--- a/Pregrado/Trabajo de grado 3/Clases/Sesion 15 - Cierre administrativo · recepción (hasta 22 nov)/Presentacion.pptx
+++ b/Pregrado/Trabajo de grado 3/Clases/Sesion 15 - Cierre administrativo · recepción (hasta 22 nov)/Presentacion.pptx
@@ -3371,41 +3371,6 @@
           </a:p>
         </p:txBody>
       </p:sp>
-      <p:sp>
-        <p:nvSpPr>
-          <p:cNvPr id="7" name="TextBox 6"/>
-          <p:cNvSpPr txBox="1"/>
-          <p:nvPr/>
-        </p:nvSpPr>
-        <p:spPr>
-          <a:xfrm>
-            <a:off x="2194560" y="6446520"/>
-            <a:ext cx="5943600" cy="274320"/>
-          </a:xfrm>
-          <a:prstGeom prst="rect">
-            <a:avLst/>
-          </a:prstGeom>
-          <a:noFill/>
-        </p:spPr>
-        <p:txBody>
-          <a:bodyPr wrap="square" anchor="t" lIns="0" rIns="0" tIns="0" bIns="0">
-            <a:spAutoFit/>
-          </a:bodyPr>
-          <a:lstStyle/>
-          <a:p>
-            <a:pPr algn="l"/>
-            <a:r>
-              <a:rPr sz="1000" b="1" i="0">
-                <a:solidFill>
-                  <a:srgbClr val="8F989D"/>
-                </a:solidFill>
-                <a:latin typeface="Calibri"/>
-              </a:rPr>
-              <a:t>Inicio 5:10 pm</a:t>
-            </a:r>
-          </a:p>
-        </p:txBody>
-      </p:sp>
     </p:spTree>
   </p:cSld>
   <p:clrMapOvr>
@@ -3778,7 +3743,7 @@
                 </a:solidFill>
                 <a:latin typeface="Calibri"/>
               </a:rPr>
-              <a:t>Constancia antiplagio</a:t>
+              <a:t>Revisión de similitud</a:t>
             </a:r>
             <a:r>
               <a:rPr sz="1500" b="0" i="0">
@@ -3787,7 +3752,7 @@
                 </a:solidFill>
                 <a:latin typeface="Calibri"/>
               </a:rPr>
-              <a:t> → cargada y abre. ✔ Capturo.</a:t>
+              <a:t> → releo lo que indicó el Docente: si el curso pide adjuntar el informe, verifico que esté cargado y que abra. ✔ Capturo.</a:t>
             </a:r>
           </a:p>
           <a:p>
@@ -3897,41 +3862,6 @@
       <p:sp>
         <p:nvSpPr>
           <p:cNvPr id="5" name="TextBox 4"/>
-          <p:cNvSpPr txBox="1"/>
-          <p:nvPr/>
-        </p:nvSpPr>
-        <p:spPr>
-          <a:xfrm>
-            <a:off x="2194560" y="6446520"/>
-            <a:ext cx="5943600" cy="274320"/>
-          </a:xfrm>
-          <a:prstGeom prst="rect">
-            <a:avLst/>
-          </a:prstGeom>
-          <a:noFill/>
-        </p:spPr>
-        <p:txBody>
-          <a:bodyPr wrap="square" anchor="t" lIns="0" rIns="0" tIns="0" bIns="0">
-            <a:spAutoFit/>
-          </a:bodyPr>
-          <a:lstStyle/>
-          <a:p>
-            <a:pPr algn="l"/>
-            <a:r>
-              <a:rPr sz="1000" b="1" i="0">
-                <a:solidFill>
-                  <a:srgbClr val="8F989D"/>
-                </a:solidFill>
-                <a:latin typeface="Calibri"/>
-              </a:rPr>
-              <a:t>Inicio 5:10 pm</a:t>
-            </a:r>
-          </a:p>
-        </p:txBody>
-      </p:sp>
-      <p:sp>
-        <p:nvSpPr>
-          <p:cNvPr id="6" name="TextBox 5"/>
           <p:cNvSpPr txBox="1"/>
           <p:nvPr/>
         </p:nvSpPr>
@@ -4116,41 +4046,6 @@
         </p:nvSpPr>
         <p:spPr>
           <a:xfrm>
-            <a:off x="2194560" y="6446520"/>
-            <a:ext cx="5943600" cy="274320"/>
-          </a:xfrm>
-          <a:prstGeom prst="rect">
-            <a:avLst/>
-          </a:prstGeom>
-          <a:noFill/>
-        </p:spPr>
-        <p:txBody>
-          <a:bodyPr wrap="square" anchor="t" lIns="0" rIns="0" tIns="0" bIns="0">
-            <a:spAutoFit/>
-          </a:bodyPr>
-          <a:lstStyle/>
-          <a:p>
-            <a:pPr algn="l"/>
-            <a:r>
-              <a:rPr sz="1000" b="1" i="0">
-                <a:solidFill>
-                  <a:srgbClr val="8F989D"/>
-                </a:solidFill>
-                <a:latin typeface="Calibri"/>
-              </a:rPr>
-              <a:t>Inicio 5:10 pm</a:t>
-            </a:r>
-          </a:p>
-        </p:txBody>
-      </p:sp>
-      <p:sp>
-        <p:nvSpPr>
-          <p:cNvPr id="6" name="TextBox 5"/>
-          <p:cNvSpPr txBox="1"/>
-          <p:nvPr/>
-        </p:nvSpPr>
-        <p:spPr>
-          <a:xfrm>
             <a:off x="11094415" y="6446520"/>
             <a:ext cx="548640" cy="274320"/>
           </a:xfrm>
@@ -4584,41 +4479,6 @@
         </p:nvSpPr>
         <p:spPr>
           <a:xfrm>
-            <a:off x="2194560" y="6446520"/>
-            <a:ext cx="5943600" cy="274320"/>
-          </a:xfrm>
-          <a:prstGeom prst="rect">
-            <a:avLst/>
-          </a:prstGeom>
-          <a:noFill/>
-        </p:spPr>
-        <p:txBody>
-          <a:bodyPr wrap="square" anchor="t" lIns="0" rIns="0" tIns="0" bIns="0">
-            <a:spAutoFit/>
-          </a:bodyPr>
-          <a:lstStyle/>
-          <a:p>
-            <a:pPr algn="l"/>
-            <a:r>
-              <a:rPr sz="1000" b="1" i="0">
-                <a:solidFill>
-                  <a:srgbClr val="8F989D"/>
-                </a:solidFill>
-                <a:latin typeface="Calibri"/>
-              </a:rPr>
-              <a:t>Inicio 5:10 pm</a:t>
-            </a:r>
-          </a:p>
-        </p:txBody>
-      </p:sp>
-      <p:sp>
-        <p:nvSpPr>
-          <p:cNvPr id="6" name="TextBox 5"/>
-          <p:cNvSpPr txBox="1"/>
-          <p:nvPr/>
-        </p:nvSpPr>
-        <p:spPr>
-          <a:xfrm>
             <a:off x="11094415" y="6446520"/>
             <a:ext cx="548640" cy="274320"/>
           </a:xfrm>
@@ -4832,41 +4692,6 @@
         </p:nvSpPr>
         <p:spPr>
           <a:xfrm>
-            <a:off x="2194560" y="6446520"/>
-            <a:ext cx="5943600" cy="274320"/>
-          </a:xfrm>
-          <a:prstGeom prst="rect">
-            <a:avLst/>
-          </a:prstGeom>
-          <a:noFill/>
-        </p:spPr>
-        <p:txBody>
-          <a:bodyPr wrap="square" anchor="t" lIns="0" rIns="0" tIns="0" bIns="0">
-            <a:spAutoFit/>
-          </a:bodyPr>
-          <a:lstStyle/>
-          <a:p>
-            <a:pPr algn="l"/>
-            <a:r>
-              <a:rPr sz="1000" b="1" i="0">
-                <a:solidFill>
-                  <a:srgbClr val="8F989D"/>
-                </a:solidFill>
-                <a:latin typeface="Calibri"/>
-              </a:rPr>
-              <a:t>Inicio 5:10 pm</a:t>
-            </a:r>
-          </a:p>
-        </p:txBody>
-      </p:sp>
-      <p:sp>
-        <p:nvSpPr>
-          <p:cNvPr id="6" name="TextBox 5"/>
-          <p:cNvSpPr txBox="1"/>
-          <p:nvPr/>
-        </p:nvSpPr>
-        <p:spPr>
-          <a:xfrm>
             <a:off x="11094415" y="6446520"/>
             <a:ext cx="548640" cy="274320"/>
           </a:xfrm>
@@ -5446,41 +5271,6 @@
         </p:nvSpPr>
         <p:spPr>
           <a:xfrm>
-            <a:off x="2194560" y="6446520"/>
-            <a:ext cx="5943600" cy="274320"/>
-          </a:xfrm>
-          <a:prstGeom prst="rect">
-            <a:avLst/>
-          </a:prstGeom>
-          <a:noFill/>
-        </p:spPr>
-        <p:txBody>
-          <a:bodyPr wrap="square" anchor="t" lIns="0" rIns="0" tIns="0" bIns="0">
-            <a:spAutoFit/>
-          </a:bodyPr>
-          <a:lstStyle/>
-          <a:p>
-            <a:pPr algn="l"/>
-            <a:r>
-              <a:rPr sz="1000" b="1" i="0">
-                <a:solidFill>
-                  <a:srgbClr val="8F989D"/>
-                </a:solidFill>
-                <a:latin typeface="Calibri"/>
-              </a:rPr>
-              <a:t>Inicio 5:10 pm</a:t>
-            </a:r>
-          </a:p>
-        </p:txBody>
-      </p:sp>
-      <p:sp>
-        <p:nvSpPr>
-          <p:cNvPr id="13" name="TextBox 12"/>
-          <p:cNvSpPr txBox="1"/>
-          <p:nvPr/>
-        </p:nvSpPr>
-        <p:spPr>
-          <a:xfrm>
             <a:off x="11094415" y="6446520"/>
             <a:ext cx="548640" cy="274320"/>
           </a:xfrm>
@@ -6033,41 +5823,6 @@
         </p:nvSpPr>
         <p:spPr>
           <a:xfrm>
-            <a:off x="2194560" y="6446520"/>
-            <a:ext cx="5943600" cy="274320"/>
-          </a:xfrm>
-          <a:prstGeom prst="rect">
-            <a:avLst/>
-          </a:prstGeom>
-          <a:noFill/>
-        </p:spPr>
-        <p:txBody>
-          <a:bodyPr wrap="square" anchor="t" lIns="0" rIns="0" tIns="0" bIns="0">
-            <a:spAutoFit/>
-          </a:bodyPr>
-          <a:lstStyle/>
-          <a:p>
-            <a:pPr algn="l"/>
-            <a:r>
-              <a:rPr sz="1000" b="1" i="0">
-                <a:solidFill>
-                  <a:srgbClr val="8F989D"/>
-                </a:solidFill>
-                <a:latin typeface="Calibri"/>
-              </a:rPr>
-              <a:t>Inicio 5:10 pm</a:t>
-            </a:r>
-          </a:p>
-        </p:txBody>
-      </p:sp>
-      <p:sp>
-        <p:nvSpPr>
-          <p:cNvPr id="13" name="TextBox 12"/>
-          <p:cNvSpPr txBox="1"/>
-          <p:nvPr/>
-        </p:nvSpPr>
-        <p:spPr>
-          <a:xfrm>
             <a:off x="11094415" y="6446520"/>
             <a:ext cx="548640" cy="274320"/>
           </a:xfrm>
@@ -6320,41 +6075,6 @@
         </p:nvSpPr>
         <p:spPr>
           <a:xfrm>
-            <a:off x="2194560" y="6446520"/>
-            <a:ext cx="5943600" cy="274320"/>
-          </a:xfrm>
-          <a:prstGeom prst="rect">
-            <a:avLst/>
-          </a:prstGeom>
-          <a:noFill/>
-        </p:spPr>
-        <p:txBody>
-          <a:bodyPr wrap="square" anchor="t" lIns="0" rIns="0" tIns="0" bIns="0">
-            <a:spAutoFit/>
-          </a:bodyPr>
-          <a:lstStyle/>
-          <a:p>
-            <a:pPr algn="l"/>
-            <a:r>
-              <a:rPr sz="1000" b="1" i="0">
-                <a:solidFill>
-                  <a:srgbClr val="8F989D"/>
-                </a:solidFill>
-                <a:latin typeface="Calibri"/>
-              </a:rPr>
-              <a:t>Inicio 5:10 pm</a:t>
-            </a:r>
-          </a:p>
-        </p:txBody>
-      </p:sp>
-      <p:sp>
-        <p:nvSpPr>
-          <p:cNvPr id="7" name="TextBox 6"/>
-          <p:cNvSpPr txBox="1"/>
-          <p:nvPr/>
-        </p:nvSpPr>
-        <p:spPr>
-          <a:xfrm>
             <a:off x="11094415" y="6446520"/>
             <a:ext cx="548640" cy="274320"/>
           </a:xfrm>
@@ -6794,41 +6514,6 @@
         </p:nvSpPr>
         <p:spPr>
           <a:xfrm>
-            <a:off x="2194560" y="6446520"/>
-            <a:ext cx="5943600" cy="274320"/>
-          </a:xfrm>
-          <a:prstGeom prst="rect">
-            <a:avLst/>
-          </a:prstGeom>
-          <a:noFill/>
-        </p:spPr>
-        <p:txBody>
-          <a:bodyPr wrap="square" anchor="t" lIns="0" rIns="0" tIns="0" bIns="0">
-            <a:spAutoFit/>
-          </a:bodyPr>
-          <a:lstStyle/>
-          <a:p>
-            <a:pPr algn="l"/>
-            <a:r>
-              <a:rPr sz="1000" b="1" i="0">
-                <a:solidFill>
-                  <a:srgbClr val="8F989D"/>
-                </a:solidFill>
-                <a:latin typeface="Calibri"/>
-              </a:rPr>
-              <a:t>Inicio 5:10 pm</a:t>
-            </a:r>
-          </a:p>
-        </p:txBody>
-      </p:sp>
-      <p:sp>
-        <p:nvSpPr>
-          <p:cNvPr id="6" name="TextBox 5"/>
-          <p:cNvSpPr txBox="1"/>
-          <p:nvPr/>
-        </p:nvSpPr>
-        <p:spPr>
-          <a:xfrm>
             <a:off x="11094415" y="6446520"/>
             <a:ext cx="548640" cy="274320"/>
           </a:xfrm>
@@ -7173,41 +6858,6 @@
       <p:sp>
         <p:nvSpPr>
           <p:cNvPr id="5" name="TextBox 4"/>
-          <p:cNvSpPr txBox="1"/>
-          <p:nvPr/>
-        </p:nvSpPr>
-        <p:spPr>
-          <a:xfrm>
-            <a:off x="2194560" y="6446520"/>
-            <a:ext cx="5943600" cy="274320"/>
-          </a:xfrm>
-          <a:prstGeom prst="rect">
-            <a:avLst/>
-          </a:prstGeom>
-          <a:noFill/>
-        </p:spPr>
-        <p:txBody>
-          <a:bodyPr wrap="square" anchor="t" lIns="0" rIns="0" tIns="0" bIns="0">
-            <a:spAutoFit/>
-          </a:bodyPr>
-          <a:lstStyle/>
-          <a:p>
-            <a:pPr algn="l"/>
-            <a:r>
-              <a:rPr sz="1000" b="1" i="0">
-                <a:solidFill>
-                  <a:srgbClr val="8F989D"/>
-                </a:solidFill>
-                <a:latin typeface="Calibri"/>
-              </a:rPr>
-              <a:t>Inicio 5:10 pm</a:t>
-            </a:r>
-          </a:p>
-        </p:txBody>
-      </p:sp>
-      <p:sp>
-        <p:nvSpPr>
-          <p:cNvPr id="6" name="TextBox 5"/>
           <p:cNvSpPr txBox="1"/>
           <p:nvPr/>
         </p:nvSpPr>
@@ -7737,7 +7387,7 @@
                           </a:solidFill>
                           <a:latin typeface="Calibri"/>
                         </a:rPr>
-                        <a:t>La constancia de antiplagio está adjunta</a:t>
+                        <a:t>Sé si el curso exige adjuntar el informe de similitud</a:t>
                       </a:r>
                     </a:p>
                   </a:txBody>
@@ -7760,7 +7410,7 @@
                           </a:solidFill>
                           <a:latin typeface="Calibri"/>
                         </a:rPr>
-                        <a:t>Generada por la ruta institucional</a:t>
+                        <a:t>Lo confirmé con el Docente; si aplica, está cargado</a:t>
                       </a:r>
                     </a:p>
                   </a:txBody>
@@ -8019,41 +7669,6 @@
         </p:nvSpPr>
         <p:spPr>
           <a:xfrm>
-            <a:off x="2194560" y="6446520"/>
-            <a:ext cx="5943600" cy="274320"/>
-          </a:xfrm>
-          <a:prstGeom prst="rect">
-            <a:avLst/>
-          </a:prstGeom>
-          <a:noFill/>
-        </p:spPr>
-        <p:txBody>
-          <a:bodyPr wrap="square" anchor="t" lIns="0" rIns="0" tIns="0" bIns="0">
-            <a:spAutoFit/>
-          </a:bodyPr>
-          <a:lstStyle/>
-          <a:p>
-            <a:pPr algn="l"/>
-            <a:r>
-              <a:rPr sz="1000" b="1" i="0">
-                <a:solidFill>
-                  <a:srgbClr val="8F989D"/>
-                </a:solidFill>
-                <a:latin typeface="Calibri"/>
-              </a:rPr>
-              <a:t>Inicio 5:10 pm</a:t>
-            </a:r>
-          </a:p>
-        </p:txBody>
-      </p:sp>
-      <p:sp>
-        <p:nvSpPr>
-          <p:cNvPr id="6" name="TextBox 5"/>
-          <p:cNvSpPr txBox="1"/>
-          <p:nvPr/>
-        </p:nvSpPr>
-        <p:spPr>
-          <a:xfrm>
             <a:off x="11094415" y="6446520"/>
             <a:ext cx="548640" cy="274320"/>
           </a:xfrm>
@@ -8451,41 +8066,6 @@
         </p:nvSpPr>
         <p:spPr>
           <a:xfrm>
-            <a:off x="2194560" y="6446520"/>
-            <a:ext cx="5943600" cy="274320"/>
-          </a:xfrm>
-          <a:prstGeom prst="rect">
-            <a:avLst/>
-          </a:prstGeom>
-          <a:noFill/>
-        </p:spPr>
-        <p:txBody>
-          <a:bodyPr wrap="square" anchor="t" lIns="0" rIns="0" tIns="0" bIns="0">
-            <a:spAutoFit/>
-          </a:bodyPr>
-          <a:lstStyle/>
-          <a:p>
-            <a:pPr algn="l"/>
-            <a:r>
-              <a:rPr sz="1000" b="1" i="0">
-                <a:solidFill>
-                  <a:srgbClr val="8F989D"/>
-                </a:solidFill>
-                <a:latin typeface="Calibri"/>
-              </a:rPr>
-              <a:t>Inicio 5:10 pm</a:t>
-            </a:r>
-          </a:p>
-        </p:txBody>
-      </p:sp>
-      <p:sp>
-        <p:nvSpPr>
-          <p:cNvPr id="6" name="TextBox 5"/>
-          <p:cNvSpPr txBox="1"/>
-          <p:nvPr/>
-        </p:nvSpPr>
-        <p:spPr>
-          <a:xfrm>
             <a:off x="11094415" y="6446520"/>
             <a:ext cx="548640" cy="274320"/>
           </a:xfrm>
@@ -8515,7 +8095,7 @@
       </p:sp>
       <p:sp>
         <p:nvSpPr>
-          <p:cNvPr id="7" name="TextBox 6"/>
+          <p:cNvPr id="6" name="TextBox 5"/>
           <p:cNvSpPr txBox="1"/>
           <p:nvPr/>
         </p:nvSpPr>
@@ -8918,41 +8498,6 @@
         </p:nvSpPr>
         <p:spPr>
           <a:xfrm>
-            <a:off x="2194560" y="6446520"/>
-            <a:ext cx="5943600" cy="274320"/>
-          </a:xfrm>
-          <a:prstGeom prst="rect">
-            <a:avLst/>
-          </a:prstGeom>
-          <a:noFill/>
-        </p:spPr>
-        <p:txBody>
-          <a:bodyPr wrap="square" anchor="t" lIns="0" rIns="0" tIns="0" bIns="0">
-            <a:spAutoFit/>
-          </a:bodyPr>
-          <a:lstStyle/>
-          <a:p>
-            <a:pPr algn="l"/>
-            <a:r>
-              <a:rPr sz="1000" b="1" i="0">
-                <a:solidFill>
-                  <a:srgbClr val="8F989D"/>
-                </a:solidFill>
-                <a:latin typeface="Calibri"/>
-              </a:rPr>
-              <a:t>Inicio 5:10 pm</a:t>
-            </a:r>
-          </a:p>
-        </p:txBody>
-      </p:sp>
-      <p:sp>
-        <p:nvSpPr>
-          <p:cNvPr id="6" name="TextBox 5"/>
-          <p:cNvSpPr txBox="1"/>
-          <p:nvPr/>
-        </p:nvSpPr>
-        <p:spPr>
-          <a:xfrm>
             <a:off x="11094415" y="6446520"/>
             <a:ext cx="548640" cy="274320"/>
           </a:xfrm>
@@ -9388,41 +8933,6 @@
         </p:nvSpPr>
         <p:spPr>
           <a:xfrm>
-            <a:off x="2194560" y="6446520"/>
-            <a:ext cx="5943600" cy="274320"/>
-          </a:xfrm>
-          <a:prstGeom prst="rect">
-            <a:avLst/>
-          </a:prstGeom>
-          <a:noFill/>
-        </p:spPr>
-        <p:txBody>
-          <a:bodyPr wrap="square" anchor="t" lIns="0" rIns="0" tIns="0" bIns="0">
-            <a:spAutoFit/>
-          </a:bodyPr>
-          <a:lstStyle/>
-          <a:p>
-            <a:pPr algn="l"/>
-            <a:r>
-              <a:rPr sz="1000" b="1" i="0">
-                <a:solidFill>
-                  <a:srgbClr val="8F989D"/>
-                </a:solidFill>
-                <a:latin typeface="Calibri"/>
-              </a:rPr>
-              <a:t>Inicio 5:10 pm</a:t>
-            </a:r>
-          </a:p>
-        </p:txBody>
-      </p:sp>
-      <p:sp>
-        <p:nvSpPr>
-          <p:cNvPr id="6" name="TextBox 5"/>
-          <p:cNvSpPr txBox="1"/>
-          <p:nvPr/>
-        </p:nvSpPr>
-        <p:spPr>
-          <a:xfrm>
             <a:off x="11094415" y="6446520"/>
             <a:ext cx="548640" cy="274320"/>
           </a:xfrm>
@@ -9686,41 +9196,6 @@
         </p:nvSpPr>
         <p:spPr>
           <a:xfrm>
-            <a:off x="2194560" y="6446520"/>
-            <a:ext cx="5943600" cy="274320"/>
-          </a:xfrm>
-          <a:prstGeom prst="rect">
-            <a:avLst/>
-          </a:prstGeom>
-          <a:noFill/>
-        </p:spPr>
-        <p:txBody>
-          <a:bodyPr wrap="square" anchor="t" lIns="0" rIns="0" tIns="0" bIns="0">
-            <a:spAutoFit/>
-          </a:bodyPr>
-          <a:lstStyle/>
-          <a:p>
-            <a:pPr algn="l"/>
-            <a:r>
-              <a:rPr sz="1000" b="1" i="0">
-                <a:solidFill>
-                  <a:srgbClr val="8F989D"/>
-                </a:solidFill>
-                <a:latin typeface="Calibri"/>
-              </a:rPr>
-              <a:t>Inicio 5:10 pm</a:t>
-            </a:r>
-          </a:p>
-        </p:txBody>
-      </p:sp>
-      <p:sp>
-        <p:nvSpPr>
-          <p:cNvPr id="6" name="TextBox 5"/>
-          <p:cNvSpPr txBox="1"/>
-          <p:nvPr/>
-        </p:nvSpPr>
-        <p:spPr>
-          <a:xfrm>
             <a:off x="11094415" y="6446520"/>
             <a:ext cx="548640" cy="274320"/>
           </a:xfrm>
@@ -10138,41 +9613,6 @@
         </p:nvSpPr>
         <p:spPr>
           <a:xfrm>
-            <a:off x="2194560" y="6446520"/>
-            <a:ext cx="5943600" cy="274320"/>
-          </a:xfrm>
-          <a:prstGeom prst="rect">
-            <a:avLst/>
-          </a:prstGeom>
-          <a:noFill/>
-        </p:spPr>
-        <p:txBody>
-          <a:bodyPr wrap="square" anchor="t" lIns="0" rIns="0" tIns="0" bIns="0">
-            <a:spAutoFit/>
-          </a:bodyPr>
-          <a:lstStyle/>
-          <a:p>
-            <a:pPr algn="l"/>
-            <a:r>
-              <a:rPr sz="1000" b="1" i="0">
-                <a:solidFill>
-                  <a:srgbClr val="8F989D"/>
-                </a:solidFill>
-                <a:latin typeface="Calibri"/>
-              </a:rPr>
-              <a:t>Inicio 5:10 pm</a:t>
-            </a:r>
-          </a:p>
-        </p:txBody>
-      </p:sp>
-      <p:sp>
-        <p:nvSpPr>
-          <p:cNvPr id="6" name="TextBox 5"/>
-          <p:cNvSpPr txBox="1"/>
-          <p:nvPr/>
-        </p:nvSpPr>
-        <p:spPr>
-          <a:xfrm>
             <a:off x="11094415" y="6446520"/>
             <a:ext cx="548640" cy="274320"/>
           </a:xfrm>
@@ -10419,41 +9859,6 @@
           </a:p>
         </p:txBody>
       </p:sp>
-      <p:sp>
-        <p:nvSpPr>
-          <p:cNvPr id="7" name="TextBox 6"/>
-          <p:cNvSpPr txBox="1"/>
-          <p:nvPr/>
-        </p:nvSpPr>
-        <p:spPr>
-          <a:xfrm>
-            <a:off x="2194560" y="6446520"/>
-            <a:ext cx="5943600" cy="274320"/>
-          </a:xfrm>
-          <a:prstGeom prst="rect">
-            <a:avLst/>
-          </a:prstGeom>
-          <a:noFill/>
-        </p:spPr>
-        <p:txBody>
-          <a:bodyPr wrap="square" anchor="t" lIns="0" rIns="0" tIns="0" bIns="0">
-            <a:spAutoFit/>
-          </a:bodyPr>
-          <a:lstStyle/>
-          <a:p>
-            <a:pPr algn="l"/>
-            <a:r>
-              <a:rPr sz="1000" b="1" i="0">
-                <a:solidFill>
-                  <a:srgbClr val="8F989D"/>
-                </a:solidFill>
-                <a:latin typeface="Calibri"/>
-              </a:rPr>
-              <a:t>Inicio 5:10 pm</a:t>
-            </a:r>
-          </a:p>
-        </p:txBody>
-      </p:sp>
     </p:spTree>
   </p:cSld>
   <p:clrMapOvr>
@@ -10824,41 +10229,6 @@
         </p:nvSpPr>
         <p:spPr>
           <a:xfrm>
-            <a:off x="2194560" y="6446520"/>
-            <a:ext cx="5943600" cy="274320"/>
-          </a:xfrm>
-          <a:prstGeom prst="rect">
-            <a:avLst/>
-          </a:prstGeom>
-          <a:noFill/>
-        </p:spPr>
-        <p:txBody>
-          <a:bodyPr wrap="square" anchor="t" lIns="0" rIns="0" tIns="0" bIns="0">
-            <a:spAutoFit/>
-          </a:bodyPr>
-          <a:lstStyle/>
-          <a:p>
-            <a:pPr algn="l"/>
-            <a:r>
-              <a:rPr sz="1000" b="1" i="0">
-                <a:solidFill>
-                  <a:srgbClr val="8F989D"/>
-                </a:solidFill>
-                <a:latin typeface="Calibri"/>
-              </a:rPr>
-              <a:t>Inicio 5:10 pm</a:t>
-            </a:r>
-          </a:p>
-        </p:txBody>
-      </p:sp>
-      <p:sp>
-        <p:nvSpPr>
-          <p:cNvPr id="6" name="TextBox 5"/>
-          <p:cNvSpPr txBox="1"/>
-          <p:nvPr/>
-        </p:nvSpPr>
-        <p:spPr>
-          <a:xfrm>
             <a:off x="11094415" y="6446520"/>
             <a:ext cx="548640" cy="274320"/>
           </a:xfrm>
@@ -11224,41 +10594,6 @@
         </p:nvSpPr>
         <p:spPr>
           <a:xfrm>
-            <a:off x="2194560" y="6446520"/>
-            <a:ext cx="5943600" cy="274320"/>
-          </a:xfrm>
-          <a:prstGeom prst="rect">
-            <a:avLst/>
-          </a:prstGeom>
-          <a:noFill/>
-        </p:spPr>
-        <p:txBody>
-          <a:bodyPr wrap="square" anchor="t" lIns="0" rIns="0" tIns="0" bIns="0">
-            <a:spAutoFit/>
-          </a:bodyPr>
-          <a:lstStyle/>
-          <a:p>
-            <a:pPr algn="l"/>
-            <a:r>
-              <a:rPr sz="1000" b="1" i="0">
-                <a:solidFill>
-                  <a:srgbClr val="8F989D"/>
-                </a:solidFill>
-                <a:latin typeface="Calibri"/>
-              </a:rPr>
-              <a:t>Inicio 5:10 pm</a:t>
-            </a:r>
-          </a:p>
-        </p:txBody>
-      </p:sp>
-      <p:sp>
-        <p:nvSpPr>
-          <p:cNvPr id="6" name="TextBox 5"/>
-          <p:cNvSpPr txBox="1"/>
-          <p:nvPr/>
-        </p:nvSpPr>
-        <p:spPr>
-          <a:xfrm>
             <a:off x="11094415" y="6446520"/>
             <a:ext cx="548640" cy="274320"/>
           </a:xfrm>
@@ -11661,41 +10996,6 @@
       <p:sp>
         <p:nvSpPr>
           <p:cNvPr id="5" name="TextBox 4"/>
-          <p:cNvSpPr txBox="1"/>
-          <p:nvPr/>
-        </p:nvSpPr>
-        <p:spPr>
-          <a:xfrm>
-            <a:off x="2194560" y="6446520"/>
-            <a:ext cx="5943600" cy="274320"/>
-          </a:xfrm>
-          <a:prstGeom prst="rect">
-            <a:avLst/>
-          </a:prstGeom>
-          <a:noFill/>
-        </p:spPr>
-        <p:txBody>
-          <a:bodyPr wrap="square" anchor="t" lIns="0" rIns="0" tIns="0" bIns="0">
-            <a:spAutoFit/>
-          </a:bodyPr>
-          <a:lstStyle/>
-          <a:p>
-            <a:pPr algn="l"/>
-            <a:r>
-              <a:rPr sz="1000" b="1" i="0">
-                <a:solidFill>
-                  <a:srgbClr val="8F989D"/>
-                </a:solidFill>
-                <a:latin typeface="Calibri"/>
-              </a:rPr>
-              <a:t>Inicio 5:10 pm</a:t>
-            </a:r>
-          </a:p>
-        </p:txBody>
-      </p:sp>
-      <p:sp>
-        <p:nvSpPr>
-          <p:cNvPr id="6" name="TextBox 5"/>
           <p:cNvSpPr txBox="1"/>
           <p:nvPr/>
         </p:nvSpPr>
@@ -12341,7 +11641,7 @@
                           </a:solidFill>
                           <a:latin typeface="Calibri"/>
                         </a:rPr>
-                        <a:t>Constancia antiplagio</a:t>
+                        <a:t>Informe de similitud (si aplica)</a:t>
                       </a:r>
                     </a:p>
                   </a:txBody>
@@ -12410,7 +11710,7 @@
                           </a:solidFill>
                           <a:latin typeface="Calibri"/>
                         </a:rPr>
-                        <a:t>Documento generado por la ruta institucional</a:t>
+                        <a:t>Solo si el Docente indicó que se adjunta</a:t>
                       </a:r>
                     </a:p>
                   </a:txBody>
@@ -12673,41 +11973,6 @@
         </p:nvSpPr>
         <p:spPr>
           <a:xfrm>
-            <a:off x="2194560" y="6446520"/>
-            <a:ext cx="5943600" cy="274320"/>
-          </a:xfrm>
-          <a:prstGeom prst="rect">
-            <a:avLst/>
-          </a:prstGeom>
-          <a:noFill/>
-        </p:spPr>
-        <p:txBody>
-          <a:bodyPr wrap="square" anchor="t" lIns="0" rIns="0" tIns="0" bIns="0">
-            <a:spAutoFit/>
-          </a:bodyPr>
-          <a:lstStyle/>
-          <a:p>
-            <a:pPr algn="l"/>
-            <a:r>
-              <a:rPr sz="1000" b="1" i="0">
-                <a:solidFill>
-                  <a:srgbClr val="8F989D"/>
-                </a:solidFill>
-                <a:latin typeface="Calibri"/>
-              </a:rPr>
-              <a:t>Inicio 5:10 pm</a:t>
-            </a:r>
-          </a:p>
-        </p:txBody>
-      </p:sp>
-      <p:sp>
-        <p:nvSpPr>
-          <p:cNvPr id="7" name="TextBox 6"/>
-          <p:cNvSpPr txBox="1"/>
-          <p:nvPr/>
-        </p:nvSpPr>
-        <p:spPr>
-          <a:xfrm>
             <a:off x="11094415" y="6446520"/>
             <a:ext cx="548640" cy="274320"/>
           </a:xfrm>
@@ -13213,41 +12478,6 @@
         </p:nvSpPr>
         <p:spPr>
           <a:xfrm>
-            <a:off x="2194560" y="6446520"/>
-            <a:ext cx="5943600" cy="274320"/>
-          </a:xfrm>
-          <a:prstGeom prst="rect">
-            <a:avLst/>
-          </a:prstGeom>
-          <a:noFill/>
-        </p:spPr>
-        <p:txBody>
-          <a:bodyPr wrap="square" anchor="t" lIns="0" rIns="0" tIns="0" bIns="0">
-            <a:spAutoFit/>
-          </a:bodyPr>
-          <a:lstStyle/>
-          <a:p>
-            <a:pPr algn="l"/>
-            <a:r>
-              <a:rPr sz="1000" b="1" i="0">
-                <a:solidFill>
-                  <a:srgbClr val="8F989D"/>
-                </a:solidFill>
-                <a:latin typeface="Calibri"/>
-              </a:rPr>
-              <a:t>Inicio 5:10 pm</a:t>
-            </a:r>
-          </a:p>
-        </p:txBody>
-      </p:sp>
-      <p:sp>
-        <p:nvSpPr>
-          <p:cNvPr id="6" name="TextBox 5"/>
-          <p:cNvSpPr txBox="1"/>
-          <p:nvPr/>
-        </p:nvSpPr>
-        <p:spPr>
-          <a:xfrm>
             <a:off x="11094415" y="6446520"/>
             <a:ext cx="548640" cy="274320"/>
           </a:xfrm>
@@ -13879,41 +13109,6 @@
         </p:nvSpPr>
         <p:spPr>
           <a:xfrm>
-            <a:off x="2194560" y="6446520"/>
-            <a:ext cx="5943600" cy="274320"/>
-          </a:xfrm>
-          <a:prstGeom prst="rect">
-            <a:avLst/>
-          </a:prstGeom>
-          <a:noFill/>
-        </p:spPr>
-        <p:txBody>
-          <a:bodyPr wrap="square" anchor="t" lIns="0" rIns="0" tIns="0" bIns="0">
-            <a:spAutoFit/>
-          </a:bodyPr>
-          <a:lstStyle/>
-          <a:p>
-            <a:pPr algn="l"/>
-            <a:r>
-              <a:rPr sz="1000" b="1" i="0">
-                <a:solidFill>
-                  <a:srgbClr val="8F989D"/>
-                </a:solidFill>
-                <a:latin typeface="Calibri"/>
-              </a:rPr>
-              <a:t>Inicio 5:10 pm</a:t>
-            </a:r>
-          </a:p>
-        </p:txBody>
-      </p:sp>
-      <p:sp>
-        <p:nvSpPr>
-          <p:cNvPr id="6" name="TextBox 5"/>
-          <p:cNvSpPr txBox="1"/>
-          <p:nvPr/>
-        </p:nvSpPr>
-        <p:spPr>
-          <a:xfrm>
             <a:off x="11094415" y="6446520"/>
             <a:ext cx="548640" cy="274320"/>
           </a:xfrm>
@@ -14176,41 +13371,6 @@
       <p:sp>
         <p:nvSpPr>
           <p:cNvPr id="5" name="TextBox 4"/>
-          <p:cNvSpPr txBox="1"/>
-          <p:nvPr/>
-        </p:nvSpPr>
-        <p:spPr>
-          <a:xfrm>
-            <a:off x="2194560" y="6446520"/>
-            <a:ext cx="5943600" cy="274320"/>
-          </a:xfrm>
-          <a:prstGeom prst="rect">
-            <a:avLst/>
-          </a:prstGeom>
-          <a:noFill/>
-        </p:spPr>
-        <p:txBody>
-          <a:bodyPr wrap="square" anchor="t" lIns="0" rIns="0" tIns="0" bIns="0">
-            <a:spAutoFit/>
-          </a:bodyPr>
-          <a:lstStyle/>
-          <a:p>
-            <a:pPr algn="l"/>
-            <a:r>
-              <a:rPr sz="1000" b="1" i="0">
-                <a:solidFill>
-                  <a:srgbClr val="8F989D"/>
-                </a:solidFill>
-                <a:latin typeface="Calibri"/>
-              </a:rPr>
-              <a:t>Inicio 5:10 pm</a:t>
-            </a:r>
-          </a:p>
-        </p:txBody>
-      </p:sp>
-      <p:sp>
-        <p:nvSpPr>
-          <p:cNvPr id="6" name="TextBox 5"/>
           <p:cNvSpPr txBox="1"/>
           <p:nvPr/>
         </p:nvSpPr>
